--- a/exports/pptx/lessons/primary-module-10-herbs-aushadhi/day-07-mint.pptx
+++ b/exports/pptx/lessons/primary-module-10-herbs-aushadhi/day-07-mint.pptx
@@ -3288,7 +3288,7 @@
         <p:spPr>
           <a:xfrm>
             <a:off x="406301" y="1254323"/>
-            <a:ext cx="8498026" cy="426541"/>
+            <a:ext cx="8498026" cy="213271"/>
           </a:xfrm>
           <a:prstGeom prst="rect">
             <a:avLst/>
@@ -3321,8 +3321,33 @@
                 <a:ea typeface="Verdana" pitchFamily="34" charset="-122"/>
                 <a:cs typeface="Verdana" pitchFamily="34" charset="-120"/>
               </a:rPr>
-              <a:t>Introduce the concept gently using a story, a drawing, or a sensory example. The concept for today: </a:t>
-            </a:r>
+              <a:t>– Today: meet Mint (Pudīnā)! 🌿</a:t>
+            </a:r>
+            <a:endParaRPr lang="en-US" sz="1200" dirty="0"/>
+          </a:p>
+        </p:txBody>
+      </p:sp>
+      <p:sp>
+        <p:nvSpPr>
+          <p:cNvPr id="6" name="Text 4"/>
+          <p:cNvSpPr/>
+          <p:nvPr/>
+        </p:nvSpPr>
+        <p:spPr>
+          <a:xfrm>
+            <a:off x="406301" y="1543794"/>
+            <a:ext cx="8498026" cy="213271"/>
+          </a:xfrm>
+          <a:prstGeom prst="rect">
+            <a:avLst/>
+          </a:prstGeom>
+          <a:noFill/>
+          <a:ln/>
+        </p:spPr>
+        <p:txBody>
+          <a:bodyPr wrap="square" lIns="0" tIns="0" rIns="0" bIns="0" rtlCol="0" anchor="t"/>
+          <a:lstStyle/>
+          <a:p>
             <a:pPr algn="l" indent="0" marL="0">
               <a:lnSpc>
                 <a:spcPts val="1680"/>
@@ -3336,7 +3361,7 @@
               <a:buNone/>
             </a:pPr>
             <a:r>
-              <a:rPr lang="en-US" sz="1200" b="1" dirty="0">
+              <a:rPr lang="en-US" sz="1200" dirty="0">
                 <a:solidFill>
                   <a:srgbClr val="2C2C2C"/>
                 </a:solidFill>
@@ -3344,8 +3369,33 @@
                 <a:ea typeface="Verdana" pitchFamily="34" charset="-122"/>
                 <a:cs typeface="Verdana" pitchFamily="34" charset="-120"/>
               </a:rPr>
-              <a:t>Mint — Cooling Leaf</a:t>
-            </a:r>
+              <a:t>Show fresh mint leaves. Smell — fresh, cool! Crush a leaf — smell stronger.</a:t>
+            </a:r>
+            <a:endParaRPr lang="en-US" sz="1200" dirty="0"/>
+          </a:p>
+        </p:txBody>
+      </p:sp>
+      <p:sp>
+        <p:nvSpPr>
+          <p:cNvPr id="7" name="Text 5"/>
+          <p:cNvSpPr/>
+          <p:nvPr/>
+        </p:nvSpPr>
+        <p:spPr>
+          <a:xfrm>
+            <a:off x="406301" y="1833265"/>
+            <a:ext cx="8498026" cy="213271"/>
+          </a:xfrm>
+          <a:prstGeom prst="rect">
+            <a:avLst/>
+          </a:prstGeom>
+          <a:noFill/>
+          <a:ln/>
+        </p:spPr>
+        <p:txBody>
+          <a:bodyPr wrap="square" lIns="0" tIns="0" rIns="0" bIns="0" rtlCol="0" anchor="t"/>
+          <a:lstStyle/>
+          <a:p>
             <a:pPr algn="l" indent="0" marL="0">
               <a:lnSpc>
                 <a:spcPts val="1680"/>
@@ -3359,7 +3409,7 @@
               <a:buNone/>
             </a:pPr>
             <a:r>
-              <a:rPr lang="en-US" sz="1200" dirty="0">
+              <a:rPr lang="en-US" sz="1200" i="1" dirty="0">
                 <a:solidFill>
                   <a:srgbClr val="2C2C2C"/>
                 </a:solidFill>
@@ -3367,7 +3417,7 @@
                 <a:ea typeface="Verdana" pitchFamily="34" charset="-122"/>
                 <a:cs typeface="Verdana" pitchFamily="34" charset="-120"/>
               </a:rPr>
-              <a:t>. Keep sentences short.</a:t>
+              <a:t>"Mint makes our mouth feel cool, even when it's not cold!"</a:t>
             </a:r>
             <a:endParaRPr lang="en-US" sz="1200" dirty="0"/>
           </a:p>
@@ -3375,7 +3425,103 @@
       </p:sp>
       <p:sp>
         <p:nvSpPr>
-          <p:cNvPr id="6" name="Text 4"/>
+          <p:cNvPr id="8" name="Text 6"/>
+          <p:cNvSpPr/>
+          <p:nvPr/>
+        </p:nvSpPr>
+        <p:spPr>
+          <a:xfrm>
+            <a:off x="406301" y="2122736"/>
+            <a:ext cx="8498026" cy="213271"/>
+          </a:xfrm>
+          <a:prstGeom prst="rect">
+            <a:avLst/>
+          </a:prstGeom>
+          <a:noFill/>
+          <a:ln/>
+        </p:spPr>
+        <p:txBody>
+          <a:bodyPr wrap="square" lIns="0" tIns="0" rIns="0" bIns="0" rtlCol="0" anchor="t"/>
+          <a:lstStyle/>
+          <a:p>
+            <a:pPr algn="l" indent="0" marL="0">
+              <a:lnSpc>
+                <a:spcPts val="1680"/>
+              </a:lnSpc>
+              <a:spcBef>
+                <a:spcPts val="300"/>
+              </a:spcBef>
+              <a:spcAft>
+                <a:spcPts val="300"/>
+              </a:spcAft>
+              <a:buNone/>
+            </a:pPr>
+            <a:r>
+              <a:rPr lang="en-US" sz="1200" dirty="0">
+                <a:solidFill>
+                  <a:srgbClr val="2C2C2C"/>
+                </a:solidFill>
+                <a:latin typeface="Verdana" pitchFamily="34" charset="0"/>
+                <a:ea typeface="Verdana" pitchFamily="34" charset="-122"/>
+                <a:cs typeface="Verdana" pitchFamily="34" charset="-120"/>
+              </a:rPr>
+              <a:t>Mint chutney is yummy with food. Mint tea is good in summer.</a:t>
+            </a:r>
+            <a:endParaRPr lang="en-US" sz="1200" dirty="0"/>
+          </a:p>
+        </p:txBody>
+      </p:sp>
+      <p:sp>
+        <p:nvSpPr>
+          <p:cNvPr id="9" name="Text 7"/>
+          <p:cNvSpPr/>
+          <p:nvPr/>
+        </p:nvSpPr>
+        <p:spPr>
+          <a:xfrm>
+            <a:off x="406301" y="2412206"/>
+            <a:ext cx="8498026" cy="213271"/>
+          </a:xfrm>
+          <a:prstGeom prst="rect">
+            <a:avLst/>
+          </a:prstGeom>
+          <a:noFill/>
+          <a:ln/>
+        </p:spPr>
+        <p:txBody>
+          <a:bodyPr wrap="square" lIns="0" tIns="0" rIns="0" bIns="0" rtlCol="0" anchor="t"/>
+          <a:lstStyle/>
+          <a:p>
+            <a:pPr algn="l" indent="0" marL="0">
+              <a:lnSpc>
+                <a:spcPts val="1680"/>
+              </a:lnSpc>
+              <a:spcBef>
+                <a:spcPts val="300"/>
+              </a:spcBef>
+              <a:spcAft>
+                <a:spcPts val="300"/>
+              </a:spcAft>
+              <a:buNone/>
+            </a:pPr>
+            <a:r>
+              <a:rPr lang="en-US" sz="1200" dirty="0">
+                <a:solidFill>
+                  <a:srgbClr val="2C2C2C"/>
+                </a:solidFill>
+                <a:latin typeface="Verdana" pitchFamily="34" charset="0"/>
+                <a:ea typeface="Verdana" pitchFamily="34" charset="-122"/>
+                <a:cs typeface="Verdana" pitchFamily="34" charset="-120"/>
+              </a:rPr>
+              <a:t>Children draw a mint leaf (small, oval, slightly bumpy) and write "pudīnā" beside.</a:t>
+            </a:r>
+            <a:endParaRPr lang="en-US" sz="1200" dirty="0"/>
+          </a:p>
+        </p:txBody>
+      </p:sp>
+      <p:sp>
+        <p:nvSpPr>
+          <p:cNvPr id="10" name="Text 8"/>
           <p:cNvSpPr/>
           <p:nvPr/>
         </p:nvSpPr>

--- a/exports/pptx/lessons/primary-module-10-herbs-aushadhi/day-07-mint.pptx
+++ b/exports/pptx/lessons/primary-module-10-herbs-aushadhi/day-07-mint.pptx
@@ -15,9 +15,11 @@
     <p:sldId id="263" r:id="rId9"/>
     <p:sldId id="264" r:id="rId10"/>
     <p:sldId id="265" r:id="rId11"/>
+    <p:sldId id="266" r:id="rId12"/>
+    <p:sldId id="267" r:id="rId13"/>
   </p:sldIdLst>
   <p:notesMasterIdLst>
-    <p:notesMasterId r:id="rId12"/>
+    <p:notesMasterId r:id="rId14"/>
   </p:notesMasterIdLst>
   <p:sldSz cx="9144000" cy="5143500"/>
   <p:notesSz cx="5143500" cy="9144000"/>
@@ -623,6 +625,182 @@
             <a:fld id="{F7021451-1387-4CA6-816F-3879F97B5CBC}" type="slidenum">
               <a:rPr lang="en-US"/>
               <a:t>10</a:t>
+            </a:fld>
+            <a:endParaRPr lang="en-US"/>
+          </a:p>
+        </p:txBody>
+      </p:sp>
+    </p:spTree>
+    <p:extLst>
+      <p:ext uri="{BB962C8B-B14F-4D97-AF65-F5344CB8AC3E}">
+        <p14:creationId xmlns:p14="http://schemas.microsoft.com/office/powerpoint/2010/main" val="1024086991"/>
+      </p:ext>
+    </p:extLst>
+  </p:cSld>
+  <p:clrMapOvr>
+    <a:masterClrMapping/>
+  </p:clrMapOvr>
+</p:notes>
+</file>
+
+<file path=ppt/notesSlides/notesSlide11.xml><?xml version="1.0" encoding="utf-8"?>
+<p:notes xmlns:a="http://schemas.openxmlformats.org/drawingml/2006/main" xmlns:r="http://schemas.openxmlformats.org/officeDocument/2006/relationships" xmlns:p="http://schemas.openxmlformats.org/presentationml/2006/main">
+  <p:cSld>
+    <p:spTree>
+      <p:nvGrpSpPr>
+        <p:cNvPr id="1" name=""/>
+        <p:cNvGrpSpPr/>
+        <p:nvPr/>
+      </p:nvGrpSpPr>
+      <p:grpSpPr>
+        <a:xfrm>
+          <a:off x="0" y="0"/>
+          <a:ext cx="0" cy="0"/>
+          <a:chOff x="0" y="0"/>
+          <a:chExt cx="0" cy="0"/>
+        </a:xfrm>
+      </p:grpSpPr>
+      <p:sp>
+        <p:nvSpPr>
+          <p:cNvPr id="2" name="Slide Image Placeholder 1"/>
+          <p:cNvSpPr>
+            <a:spLocks noGrp="1" noRot="1" noChangeAspect="1"/>
+          </p:cNvSpPr>
+          <p:nvPr>
+            <p:ph type="sldImg"/>
+          </p:nvPr>
+        </p:nvSpPr>
+        <p:spPr/>
+      </p:sp>
+      <p:sp>
+        <p:nvSpPr>
+          <p:cNvPr id="3" name="Notes Placeholder 2"/>
+          <p:cNvSpPr>
+            <a:spLocks noGrp="1"/>
+          </p:cNvSpPr>
+          <p:nvPr>
+            <p:ph type="body" idx="1"/>
+          </p:nvPr>
+        </p:nvSpPr>
+        <p:spPr/>
+        <p:txBody>
+          <a:bodyPr/>
+          <a:lstStyle/>
+          <a:p>
+            <a:r>
+              <a:rPr lang="en-US" dirty="0"/>
+              <a:t/>
+            </a:r>
+            <a:endParaRPr lang="en-US" dirty="0"/>
+          </a:p>
+        </p:txBody>
+      </p:sp>
+      <p:sp>
+        <p:nvSpPr>
+          <p:cNvPr id="4" name="Slide Number Placeholder 3"/>
+          <p:cNvSpPr>
+            <a:spLocks noGrp="1"/>
+          </p:cNvSpPr>
+          <p:nvPr>
+            <p:ph type="sldNum" sz="quarter" idx="10"/>
+          </p:nvPr>
+        </p:nvSpPr>
+        <p:spPr/>
+        <p:txBody>
+          <a:bodyPr/>
+          <a:lstStyle/>
+          <a:p>
+            <a:fld id="{F7021451-1387-4CA6-816F-3879F97B5CBC}" type="slidenum">
+              <a:rPr lang="en-US"/>
+              <a:t>11</a:t>
+            </a:fld>
+            <a:endParaRPr lang="en-US"/>
+          </a:p>
+        </p:txBody>
+      </p:sp>
+    </p:spTree>
+    <p:extLst>
+      <p:ext uri="{BB962C8B-B14F-4D97-AF65-F5344CB8AC3E}">
+        <p14:creationId xmlns:p14="http://schemas.microsoft.com/office/powerpoint/2010/main" val="1024086991"/>
+      </p:ext>
+    </p:extLst>
+  </p:cSld>
+  <p:clrMapOvr>
+    <a:masterClrMapping/>
+  </p:clrMapOvr>
+</p:notes>
+</file>
+
+<file path=ppt/notesSlides/notesSlide12.xml><?xml version="1.0" encoding="utf-8"?>
+<p:notes xmlns:a="http://schemas.openxmlformats.org/drawingml/2006/main" xmlns:r="http://schemas.openxmlformats.org/officeDocument/2006/relationships" xmlns:p="http://schemas.openxmlformats.org/presentationml/2006/main">
+  <p:cSld>
+    <p:spTree>
+      <p:nvGrpSpPr>
+        <p:cNvPr id="1" name=""/>
+        <p:cNvGrpSpPr/>
+        <p:nvPr/>
+      </p:nvGrpSpPr>
+      <p:grpSpPr>
+        <a:xfrm>
+          <a:off x="0" y="0"/>
+          <a:ext cx="0" cy="0"/>
+          <a:chOff x="0" y="0"/>
+          <a:chExt cx="0" cy="0"/>
+        </a:xfrm>
+      </p:grpSpPr>
+      <p:sp>
+        <p:nvSpPr>
+          <p:cNvPr id="2" name="Slide Image Placeholder 1"/>
+          <p:cNvSpPr>
+            <a:spLocks noGrp="1" noRot="1" noChangeAspect="1"/>
+          </p:cNvSpPr>
+          <p:nvPr>
+            <p:ph type="sldImg"/>
+          </p:nvPr>
+        </p:nvSpPr>
+        <p:spPr/>
+      </p:sp>
+      <p:sp>
+        <p:nvSpPr>
+          <p:cNvPr id="3" name="Notes Placeholder 2"/>
+          <p:cNvSpPr>
+            <a:spLocks noGrp="1"/>
+          </p:cNvSpPr>
+          <p:nvPr>
+            <p:ph type="body" idx="1"/>
+          </p:nvPr>
+        </p:nvSpPr>
+        <p:spPr/>
+        <p:txBody>
+          <a:bodyPr/>
+          <a:lstStyle/>
+          <a:p>
+            <a:r>
+              <a:rPr lang="en-US" dirty="0"/>
+              <a:t/>
+            </a:r>
+            <a:endParaRPr lang="en-US" dirty="0"/>
+          </a:p>
+        </p:txBody>
+      </p:sp>
+      <p:sp>
+        <p:nvSpPr>
+          <p:cNvPr id="4" name="Slide Number Placeholder 3"/>
+          <p:cNvSpPr>
+            <a:spLocks noGrp="1"/>
+          </p:cNvSpPr>
+          <p:nvPr>
+            <p:ph type="sldNum" sz="quarter" idx="10"/>
+          </p:nvPr>
+        </p:nvSpPr>
+        <p:spPr/>
+        <p:txBody>
+          <a:bodyPr/>
+          <a:lstStyle/>
+          <a:p>
+            <a:fld id="{F7021451-1387-4CA6-816F-3879F97B5CBC}" type="slidenum">
+              <a:rPr lang="en-US"/>
+              <a:t>12</a:t>
             </a:fld>
             <a:endParaRPr lang="en-US"/>
           </a:p>
@@ -1876,102 +2054,6 @@
         </p:nvSpPr>
         <p:spPr>
           <a:xfrm>
-            <a:off x="406301" y="1223963"/>
-            <a:ext cx="8498026" cy="274290"/>
-          </a:xfrm>
-          <a:prstGeom prst="rect">
-            <a:avLst/>
-          </a:prstGeom>
-          <a:noFill/>
-          <a:ln/>
-        </p:spPr>
-        <p:txBody>
-          <a:bodyPr wrap="square" lIns="0" tIns="0" rIns="0" bIns="0" rtlCol="0" anchor="t"/>
-          <a:lstStyle/>
-          <a:p>
-            <a:pPr algn="l" indent="0" marL="0">
-              <a:lnSpc>
-                <a:spcPts val="2160"/>
-              </a:lnSpc>
-              <a:spcBef>
-                <a:spcPts val="600"/>
-              </a:spcBef>
-              <a:spcAft>
-                <a:spcPts val="800"/>
-              </a:spcAft>
-              <a:buNone/>
-            </a:pPr>
-            <a:r>
-              <a:rPr lang="en-US" sz="1800" b="1" dirty="0">
-                <a:solidFill>
-                  <a:srgbClr val="E07A5F"/>
-                </a:solidFill>
-                <a:latin typeface="Georgia" pitchFamily="34" charset="0"/>
-                <a:ea typeface="Georgia" pitchFamily="34" charset="-122"/>
-                <a:cs typeface="Georgia" pitchFamily="34" charset="-120"/>
-              </a:rPr>
-              <a:t>Goal</a:t>
-            </a:r>
-            <a:endParaRPr lang="en-US" sz="1800" dirty="0"/>
-          </a:p>
-        </p:txBody>
-      </p:sp>
-      <p:sp>
-        <p:nvSpPr>
-          <p:cNvPr id="6" name="Text 4"/>
-          <p:cNvSpPr/>
-          <p:nvPr/>
-        </p:nvSpPr>
-        <p:spPr>
-          <a:xfrm>
-            <a:off x="406301" y="1637854"/>
-            <a:ext cx="8498026" cy="213271"/>
-          </a:xfrm>
-          <a:prstGeom prst="rect">
-            <a:avLst/>
-          </a:prstGeom>
-          <a:noFill/>
-          <a:ln/>
-        </p:spPr>
-        <p:txBody>
-          <a:bodyPr wrap="square" lIns="0" tIns="0" rIns="0" bIns="0" rtlCol="0" anchor="t"/>
-          <a:lstStyle/>
-          <a:p>
-            <a:pPr algn="l" indent="0" marL="0">
-              <a:lnSpc>
-                <a:spcPts val="1680"/>
-              </a:lnSpc>
-              <a:spcBef>
-                <a:spcPts val="300"/>
-              </a:spcBef>
-              <a:spcAft>
-                <a:spcPts val="300"/>
-              </a:spcAft>
-              <a:buNone/>
-            </a:pPr>
-            <a:r>
-              <a:rPr lang="en-US" sz="1200" dirty="0">
-                <a:solidFill>
-                  <a:srgbClr val="2C2C2C"/>
-                </a:solidFill>
-                <a:latin typeface="Verdana" pitchFamily="34" charset="0"/>
-                <a:ea typeface="Verdana" pitchFamily="34" charset="-122"/>
-                <a:cs typeface="Verdana" pitchFamily="34" charset="-120"/>
-              </a:rPr>
-              <a:t>Recognise several Mentha varieties; identify menthol.</a:t>
-            </a:r>
-            <a:endParaRPr lang="en-US" sz="1200" dirty="0"/>
-          </a:p>
-        </p:txBody>
-      </p:sp>
-      <p:sp>
-        <p:nvSpPr>
-          <p:cNvPr id="7" name="Text 5"/>
-          <p:cNvSpPr/>
-          <p:nvPr/>
-        </p:nvSpPr>
-        <p:spPr>
-          <a:xfrm>
             <a:off x="406301" y="4434929"/>
             <a:ext cx="8498026" cy="213271"/>
           </a:xfrm>
@@ -2116,7 +2198,7 @@
                 <a:ea typeface="Georgia" pitchFamily="34" charset="-122"/>
                 <a:cs typeface="Georgia" pitchFamily="34" charset="-120"/>
               </a:rPr>
-              <a:t>Teacher notes</a:t>
+              <a:t>Wrap-up (3 min)</a:t>
             </a:r>
             <a:endParaRPr lang="en-US" sz="1800" dirty="0"/>
           </a:p>
@@ -2131,7 +2213,7 @@
         <p:spPr>
           <a:xfrm>
             <a:off x="406301" y="870942"/>
-            <a:ext cx="8498026" cy="426541"/>
+            <a:ext cx="8498026" cy="213271"/>
           </a:xfrm>
           <a:prstGeom prst="rect">
             <a:avLst/>
@@ -2164,7 +2246,511 @@
                 <a:ea typeface="Verdana" pitchFamily="34" charset="-122"/>
                 <a:cs typeface="Verdana" pitchFamily="34" charset="-120"/>
               </a:rPr>
-              <a:t>– Citations belong in teacher notes only, not in student-facing material at this band. – Keep new Sanskrit terms to one per lesson, repeated several times. – If energy is low, swap the activity for free drawing.</a:t>
+              <a:t>Each child shares one word that describes today.</a:t>
+            </a:r>
+            <a:endParaRPr lang="en-US" sz="1200" dirty="0"/>
+          </a:p>
+        </p:txBody>
+      </p:sp>
+      <p:sp>
+        <p:nvSpPr>
+          <p:cNvPr id="5" name="Text 3"/>
+          <p:cNvSpPr/>
+          <p:nvPr/>
+        </p:nvSpPr>
+        <p:spPr>
+          <a:xfrm>
+            <a:off x="406301" y="4434929"/>
+            <a:ext cx="8498026" cy="213271"/>
+          </a:xfrm>
+          <a:prstGeom prst="rect">
+            <a:avLst/>
+          </a:prstGeom>
+          <a:noFill/>
+          <a:ln/>
+        </p:spPr>
+        <p:txBody>
+          <a:bodyPr wrap="square" lIns="0" tIns="0" rIns="0" bIns="0" rtlCol="0" anchor="t"/>
+          <a:lstStyle/>
+          <a:p>
+            <a:pPr algn="l" indent="0" marL="0">
+              <a:lnSpc>
+                <a:spcPts val="1680"/>
+              </a:lnSpc>
+              <a:spcBef>
+                <a:spcPts val="300"/>
+              </a:spcBef>
+              <a:spcAft>
+                <a:spcPts val="300"/>
+              </a:spcAft>
+              <a:buNone/>
+            </a:pPr>
+            <a:r>
+              <a:rPr lang="en-US" sz="1200" dirty="0">
+                <a:solidFill>
+                  <a:srgbClr val="2C2C2C"/>
+                </a:solidFill>
+                <a:latin typeface="Verdana" pitchFamily="34" charset="0"/>
+                <a:ea typeface="Verdana" pitchFamily="34" charset="-122"/>
+                <a:cs typeface="Verdana" pitchFamily="34" charset="-120"/>
+              </a:rPr>
+              <a:t>Primary ·  · IKS Curriculum</a:t>
+            </a:r>
+            <a:endParaRPr lang="en-US" sz="1200" dirty="0"/>
+          </a:p>
+        </p:txBody>
+      </p:sp>
+    </p:spTree>
+  </p:cSld>
+  <p:clrMapOvr>
+    <a:masterClrMapping/>
+  </p:clrMapOvr>
+</p:sld>
+</file>
+
+<file path=ppt/slides/slide11.xml><?xml version="1.0" encoding="utf-8"?>
+<p:sld xmlns:a="http://schemas.openxmlformats.org/drawingml/2006/main" xmlns:r="http://schemas.openxmlformats.org/officeDocument/2006/relationships" xmlns:p="http://schemas.openxmlformats.org/presentationml/2006/main">
+  <p:cSld name="Slide 11">
+    <p:bg>
+      <p:bgPr>
+        <a:solidFill>
+          <a:srgbClr val="FAF7F2"/>
+        </a:solidFill>
+      </p:bgPr>
+    </p:bg>
+    <p:spTree>
+      <p:nvGrpSpPr>
+        <p:cNvPr id="1" name=""/>
+        <p:cNvGrpSpPr/>
+        <p:nvPr/>
+      </p:nvGrpSpPr>
+      <p:grpSpPr>
+        <a:xfrm>
+          <a:off x="0" y="0"/>
+          <a:ext cx="0" cy="0"/>
+          <a:chOff x="0" y="0"/>
+          <a:chExt cx="0" cy="0"/>
+        </a:xfrm>
+      </p:grpSpPr>
+      <p:sp>
+        <p:nvSpPr>
+          <p:cNvPr id="2" name="Text 0"/>
+          <p:cNvSpPr/>
+          <p:nvPr/>
+        </p:nvSpPr>
+        <p:spPr>
+          <a:xfrm>
+            <a:off x="0" y="0"/>
+            <a:ext cx="9144000" cy="101501"/>
+          </a:xfrm>
+          <a:prstGeom prst="rect">
+            <a:avLst/>
+          </a:prstGeom>
+          <a:solidFill>
+            <a:srgbClr val="87A96B"/>
+          </a:solidFill>
+          <a:ln/>
+        </p:spPr>
+        <p:txBody>
+          <a:bodyPr wrap="square" rtlCol="0" anchor="ctr"/>
+          <a:lstStyle/>
+          <a:p>
+            <a:pPr indent="0" marL="0">
+              <a:buNone/>
+            </a:pPr>
+            <a:endParaRPr lang="en-US" dirty="0"/>
+          </a:p>
+        </p:txBody>
+      </p:sp>
+      <p:sp>
+        <p:nvSpPr>
+          <p:cNvPr id="3" name="Text 1"/>
+          <p:cNvSpPr/>
+          <p:nvPr/>
+        </p:nvSpPr>
+        <p:spPr>
+          <a:xfrm>
+            <a:off x="406301" y="457051"/>
+            <a:ext cx="8498026" cy="274290"/>
+          </a:xfrm>
+          <a:prstGeom prst="rect">
+            <a:avLst/>
+          </a:prstGeom>
+          <a:noFill/>
+          <a:ln/>
+        </p:spPr>
+        <p:txBody>
+          <a:bodyPr wrap="square" lIns="0" tIns="0" rIns="0" bIns="0" rtlCol="0" anchor="t"/>
+          <a:lstStyle/>
+          <a:p>
+            <a:pPr algn="l" indent="0" marL="0">
+              <a:lnSpc>
+                <a:spcPts val="2160"/>
+              </a:lnSpc>
+              <a:spcBef>
+                <a:spcPts val="600"/>
+              </a:spcBef>
+              <a:spcAft>
+                <a:spcPts val="800"/>
+              </a:spcAft>
+              <a:buNone/>
+            </a:pPr>
+            <a:r>
+              <a:rPr lang="en-US" sz="1800" b="1" dirty="0">
+                <a:solidFill>
+                  <a:srgbClr val="E07A5F"/>
+                </a:solidFill>
+                <a:latin typeface="Georgia" pitchFamily="34" charset="0"/>
+                <a:ea typeface="Georgia" pitchFamily="34" charset="-122"/>
+                <a:cs typeface="Georgia" pitchFamily="34" charset="-120"/>
+              </a:rPr>
+              <a:t>Homework</a:t>
+            </a:r>
+            <a:endParaRPr lang="en-US" sz="1800" dirty="0"/>
+          </a:p>
+        </p:txBody>
+      </p:sp>
+      <p:sp>
+        <p:nvSpPr>
+          <p:cNvPr id="4" name="Text 2"/>
+          <p:cNvSpPr/>
+          <p:nvPr/>
+        </p:nvSpPr>
+        <p:spPr>
+          <a:xfrm>
+            <a:off x="406301" y="870942"/>
+            <a:ext cx="8498026" cy="232321"/>
+          </a:xfrm>
+          <a:prstGeom prst="rect">
+            <a:avLst/>
+          </a:prstGeom>
+          <a:noFill/>
+          <a:ln/>
+        </p:spPr>
+        <p:txBody>
+          <a:bodyPr wrap="square" lIns="0" tIns="0" rIns="0" bIns="0" rtlCol="0" anchor="t"/>
+          <a:lstStyle/>
+          <a:p>
+            <a:pPr algn="l" indent="0" marL="0">
+              <a:lnSpc>
+                <a:spcPts val="1680"/>
+              </a:lnSpc>
+              <a:spcBef>
+                <a:spcPts val="300"/>
+              </a:spcBef>
+              <a:spcAft>
+                <a:spcPts val="300"/>
+              </a:spcAft>
+              <a:buNone/>
+            </a:pPr>
+            <a:r>
+              <a:rPr lang="en-US" sz="1200" dirty="0">
+                <a:solidFill>
+                  <a:srgbClr val="2C2C2C"/>
+                </a:solidFill>
+                <a:latin typeface="Verdana" pitchFamily="34" charset="0"/>
+                <a:ea typeface="Verdana" pitchFamily="34" charset="-122"/>
+                <a:cs typeface="Verdana" pitchFamily="34" charset="-120"/>
+              </a:rPr>
+              <a:t>(See </a:t>
+            </a:r>
+            <a:pPr algn="l" indent="0" marL="0">
+              <a:lnSpc>
+                <a:spcPts val="1680"/>
+              </a:lnSpc>
+              <a:spcBef>
+                <a:spcPts val="300"/>
+              </a:spcBef>
+              <a:spcAft>
+                <a:spcPts val="300"/>
+              </a:spcAft>
+              <a:buNone/>
+            </a:pPr>
+            <a:r>
+              <a:rPr lang="en-US" sz="1200" dirty="0">
+                <a:solidFill>
+                  <a:srgbClr val="2C2C2C"/>
+                </a:solidFill>
+                <a:latin typeface="Verdana" pitchFamily="34" charset="0"/>
+                <a:ea typeface="Verdana" pitchFamily="34" charset="-122"/>
+                <a:cs typeface="Verdana" pitchFamily="34" charset="-120"/>
+              </a:rPr>
+              <a:t>homework.md</a:t>
+            </a:r>
+            <a:pPr algn="l" indent="0" marL="0">
+              <a:lnSpc>
+                <a:spcPts val="1680"/>
+              </a:lnSpc>
+              <a:spcBef>
+                <a:spcPts val="300"/>
+              </a:spcBef>
+              <a:spcAft>
+                <a:spcPts val="300"/>
+              </a:spcAft>
+              <a:buNone/>
+            </a:pPr>
+            <a:r>
+              <a:rPr lang="en-US" sz="1200" dirty="0">
+                <a:solidFill>
+                  <a:srgbClr val="2C2C2C"/>
+                </a:solidFill>
+                <a:latin typeface="Verdana" pitchFamily="34" charset="0"/>
+                <a:ea typeface="Verdana" pitchFamily="34" charset="-122"/>
+                <a:cs typeface="Verdana" pitchFamily="34" charset="-120"/>
+              </a:rPr>
+              <a:t>.)</a:t>
+            </a:r>
+            <a:endParaRPr lang="en-US" sz="1200" dirty="0"/>
+          </a:p>
+        </p:txBody>
+      </p:sp>
+      <p:sp>
+        <p:nvSpPr>
+          <p:cNvPr id="5" name="Text 3"/>
+          <p:cNvSpPr/>
+          <p:nvPr/>
+        </p:nvSpPr>
+        <p:spPr>
+          <a:xfrm>
+            <a:off x="406301" y="4434929"/>
+            <a:ext cx="8498026" cy="213271"/>
+          </a:xfrm>
+          <a:prstGeom prst="rect">
+            <a:avLst/>
+          </a:prstGeom>
+          <a:noFill/>
+          <a:ln/>
+        </p:spPr>
+        <p:txBody>
+          <a:bodyPr wrap="square" lIns="0" tIns="0" rIns="0" bIns="0" rtlCol="0" anchor="t"/>
+          <a:lstStyle/>
+          <a:p>
+            <a:pPr algn="l" indent="0" marL="0">
+              <a:lnSpc>
+                <a:spcPts val="1680"/>
+              </a:lnSpc>
+              <a:spcBef>
+                <a:spcPts val="300"/>
+              </a:spcBef>
+              <a:spcAft>
+                <a:spcPts val="300"/>
+              </a:spcAft>
+              <a:buNone/>
+            </a:pPr>
+            <a:r>
+              <a:rPr lang="en-US" sz="1200" dirty="0">
+                <a:solidFill>
+                  <a:srgbClr val="2C2C2C"/>
+                </a:solidFill>
+                <a:latin typeface="Verdana" pitchFamily="34" charset="0"/>
+                <a:ea typeface="Verdana" pitchFamily="34" charset="-122"/>
+                <a:cs typeface="Verdana" pitchFamily="34" charset="-120"/>
+              </a:rPr>
+              <a:t>Primary ·  · IKS Curriculum</a:t>
+            </a:r>
+            <a:endParaRPr lang="en-US" sz="1200" dirty="0"/>
+          </a:p>
+        </p:txBody>
+      </p:sp>
+    </p:spTree>
+  </p:cSld>
+  <p:clrMapOvr>
+    <a:masterClrMapping/>
+  </p:clrMapOvr>
+</p:sld>
+</file>
+
+<file path=ppt/slides/slide12.xml><?xml version="1.0" encoding="utf-8"?>
+<p:sld xmlns:a="http://schemas.openxmlformats.org/drawingml/2006/main" xmlns:r="http://schemas.openxmlformats.org/officeDocument/2006/relationships" xmlns:p="http://schemas.openxmlformats.org/presentationml/2006/main">
+  <p:cSld name="Slide 12">
+    <p:bg>
+      <p:bgPr>
+        <a:solidFill>
+          <a:srgbClr val="FAF7F2"/>
+        </a:solidFill>
+      </p:bgPr>
+    </p:bg>
+    <p:spTree>
+      <p:nvGrpSpPr>
+        <p:cNvPr id="1" name=""/>
+        <p:cNvGrpSpPr/>
+        <p:nvPr/>
+      </p:nvGrpSpPr>
+      <p:grpSpPr>
+        <a:xfrm>
+          <a:off x="0" y="0"/>
+          <a:ext cx="0" cy="0"/>
+          <a:chOff x="0" y="0"/>
+          <a:chExt cx="0" cy="0"/>
+        </a:xfrm>
+      </p:grpSpPr>
+      <p:sp>
+        <p:nvSpPr>
+          <p:cNvPr id="2" name="Text 0"/>
+          <p:cNvSpPr/>
+          <p:nvPr/>
+        </p:nvSpPr>
+        <p:spPr>
+          <a:xfrm>
+            <a:off x="0" y="0"/>
+            <a:ext cx="9144000" cy="101501"/>
+          </a:xfrm>
+          <a:prstGeom prst="rect">
+            <a:avLst/>
+          </a:prstGeom>
+          <a:solidFill>
+            <a:srgbClr val="87A96B"/>
+          </a:solidFill>
+          <a:ln/>
+        </p:spPr>
+        <p:txBody>
+          <a:bodyPr wrap="square" rtlCol="0" anchor="ctr"/>
+          <a:lstStyle/>
+          <a:p>
+            <a:pPr indent="0" marL="0">
+              <a:buNone/>
+            </a:pPr>
+            <a:endParaRPr lang="en-US" dirty="0"/>
+          </a:p>
+        </p:txBody>
+      </p:sp>
+      <p:sp>
+        <p:nvSpPr>
+          <p:cNvPr id="3" name="Text 1"/>
+          <p:cNvSpPr/>
+          <p:nvPr/>
+        </p:nvSpPr>
+        <p:spPr>
+          <a:xfrm>
+            <a:off x="406301" y="457051"/>
+            <a:ext cx="8498026" cy="274290"/>
+          </a:xfrm>
+          <a:prstGeom prst="rect">
+            <a:avLst/>
+          </a:prstGeom>
+          <a:noFill/>
+          <a:ln/>
+        </p:spPr>
+        <p:txBody>
+          <a:bodyPr wrap="square" lIns="0" tIns="0" rIns="0" bIns="0" rtlCol="0" anchor="t"/>
+          <a:lstStyle/>
+          <a:p>
+            <a:pPr algn="l" indent="0" marL="0">
+              <a:lnSpc>
+                <a:spcPts val="2160"/>
+              </a:lnSpc>
+              <a:spcBef>
+                <a:spcPts val="600"/>
+              </a:spcBef>
+              <a:spcAft>
+                <a:spcPts val="800"/>
+              </a:spcAft>
+              <a:buNone/>
+            </a:pPr>
+            <a:r>
+              <a:rPr lang="en-US" sz="1800" b="1" dirty="0">
+                <a:solidFill>
+                  <a:srgbClr val="E07A5F"/>
+                </a:solidFill>
+                <a:latin typeface="Georgia" pitchFamily="34" charset="0"/>
+                <a:ea typeface="Georgia" pitchFamily="34" charset="-122"/>
+                <a:cs typeface="Georgia" pitchFamily="34" charset="-120"/>
+              </a:rPr>
+              <a:t>Teacher notes</a:t>
+            </a:r>
+            <a:endParaRPr lang="en-US" sz="1800" dirty="0"/>
+          </a:p>
+        </p:txBody>
+      </p:sp>
+      <p:sp>
+        <p:nvSpPr>
+          <p:cNvPr id="4" name="Text 2"/>
+          <p:cNvSpPr/>
+          <p:nvPr/>
+        </p:nvSpPr>
+        <p:spPr>
+          <a:xfrm>
+            <a:off x="634901" y="883593"/>
+            <a:ext cx="8102798" cy="769441"/>
+          </a:xfrm>
+          <a:prstGeom prst="rect">
+            <a:avLst/>
+          </a:prstGeom>
+          <a:noFill/>
+          <a:ln/>
+        </p:spPr>
+        <p:txBody>
+          <a:bodyPr wrap="square" lIns="0" tIns="0" rIns="0" bIns="0" rtlCol="0" anchor="t"/>
+          <a:lstStyle/>
+          <a:p>
+            <a:pPr algn="l" marL="342900" indent="-342900">
+              <a:lnSpc>
+                <a:spcPts val="1620"/>
+              </a:lnSpc>
+              <a:spcAft>
+                <a:spcPts val="300"/>
+              </a:spcAft>
+              <a:buSzPct val="100000"/>
+              <a:buChar char="•"/>
+            </a:pPr>
+            <a:r>
+              <a:rPr lang="en-US" sz="1200" dirty="0">
+                <a:solidFill>
+                  <a:srgbClr val="2C2C2C"/>
+                </a:solidFill>
+                <a:latin typeface="Verdana" pitchFamily="34" charset="0"/>
+                <a:ea typeface="Verdana" pitchFamily="34" charset="-122"/>
+                <a:cs typeface="Verdana" pitchFamily="34" charset="-120"/>
+              </a:rPr>
+              <a:t>Citations belong in teacher notes only, not in student-facing material at this band.</a:t>
+            </a:r>
+            <a:endParaRPr lang="en-US" sz="1200" dirty="0"/>
+          </a:p>
+          <a:p>
+            <a:pPr algn="l" marL="342900" indent="-342900">
+              <a:lnSpc>
+                <a:spcPts val="1620"/>
+              </a:lnSpc>
+              <a:spcAft>
+                <a:spcPts val="300"/>
+              </a:spcAft>
+              <a:buSzPct val="100000"/>
+              <a:buChar char="•"/>
+            </a:pPr>
+            <a:r>
+              <a:rPr lang="en-US" sz="1200" dirty="0">
+                <a:solidFill>
+                  <a:srgbClr val="2C2C2C"/>
+                </a:solidFill>
+                <a:latin typeface="Verdana" pitchFamily="34" charset="0"/>
+                <a:ea typeface="Verdana" pitchFamily="34" charset="-122"/>
+                <a:cs typeface="Verdana" pitchFamily="34" charset="-120"/>
+              </a:rPr>
+              <a:t>Keep new Sanskrit terms to one per lesson, repeated several times.</a:t>
+            </a:r>
+            <a:endParaRPr lang="en-US" sz="1200" dirty="0"/>
+          </a:p>
+          <a:p>
+            <a:pPr algn="l" marL="342900" indent="-342900">
+              <a:lnSpc>
+                <a:spcPts val="1620"/>
+              </a:lnSpc>
+              <a:spcAft>
+                <a:spcPts val="300"/>
+              </a:spcAft>
+              <a:buSzPct val="100000"/>
+              <a:buChar char="•"/>
+            </a:pPr>
+            <a:r>
+              <a:rPr lang="en-US" sz="1200" dirty="0">
+                <a:solidFill>
+                  <a:srgbClr val="2C2C2C"/>
+                </a:solidFill>
+                <a:latin typeface="Verdana" pitchFamily="34" charset="0"/>
+                <a:ea typeface="Verdana" pitchFamily="34" charset="-122"/>
+                <a:cs typeface="Verdana" pitchFamily="34" charset="-120"/>
+              </a:rPr>
+              <a:t>If energy is low, swap the activity for free drawing.</a:t>
             </a:r>
             <a:endParaRPr lang="en-US" sz="1200" dirty="0"/>
           </a:p>
@@ -2322,7 +2908,7 @@
                 <a:ea typeface="Georgia" pitchFamily="34" charset="-122"/>
                 <a:cs typeface="Georgia" pitchFamily="34" charset="-120"/>
               </a:rPr>
-              <a:t>Materials</a:t>
+              <a:t>Goal</a:t>
             </a:r>
             <a:endParaRPr lang="en-US" sz="1800" dirty="0"/>
           </a:p>
@@ -2370,7 +2956,7 @@
                 <a:ea typeface="Verdana" pitchFamily="34" charset="-122"/>
                 <a:cs typeface="Verdana" pitchFamily="34" charset="-120"/>
               </a:rPr>
-              <a:t>– Notebook, pencils, drawing paper</a:t>
+              <a:t>Recognise several Mentha varieties; identify menthol.</a:t>
             </a:r>
             <a:endParaRPr lang="en-US" sz="1200" dirty="0"/>
           </a:p>
@@ -2379,52 +2965,6 @@
       <p:sp>
         <p:nvSpPr>
           <p:cNvPr id="5" name="Text 3"/>
-          <p:cNvSpPr/>
-          <p:nvPr/>
-        </p:nvSpPr>
-        <p:spPr>
-          <a:xfrm>
-            <a:off x="634901" y="1173063"/>
-            <a:ext cx="8102798" cy="281880"/>
-          </a:xfrm>
-          <a:prstGeom prst="rect">
-            <a:avLst/>
-          </a:prstGeom>
-          <a:noFill/>
-          <a:ln/>
-        </p:spPr>
-        <p:txBody>
-          <a:bodyPr wrap="square" lIns="0" tIns="0" rIns="0" bIns="0" rtlCol="0" anchor="t"/>
-          <a:lstStyle/>
-          <a:p>
-            <a:pPr algn="l" marL="342900" indent="-342900">
-              <a:lnSpc>
-                <a:spcPts val="1620"/>
-              </a:lnSpc>
-              <a:spcAft>
-                <a:spcPts val="300"/>
-              </a:spcAft>
-              <a:buSzPct val="100000"/>
-              <a:buChar char="•"/>
-            </a:pPr>
-            <a:r>
-              <a:rPr lang="en-US" sz="1200" dirty="0">
-                <a:solidFill>
-                  <a:srgbClr val="2C2C2C"/>
-                </a:solidFill>
-                <a:latin typeface="Verdana" pitchFamily="34" charset="0"/>
-                <a:ea typeface="Verdana" pitchFamily="34" charset="-122"/>
-                <a:cs typeface="Verdana" pitchFamily="34" charset="-120"/>
-              </a:rPr>
-              <a:t>(See lesson-plan.md for any day-specific materials)</a:t>
-            </a:r>
-            <a:endParaRPr lang="en-US" sz="1200" dirty="0"/>
-          </a:p>
-        </p:txBody>
-      </p:sp>
-      <p:sp>
-        <p:nvSpPr>
-          <p:cNvPr id="6" name="Text 4"/>
           <p:cNvSpPr/>
           <p:nvPr/>
         </p:nvSpPr>
@@ -2574,7 +3114,7 @@
                 <a:ea typeface="Georgia" pitchFamily="34" charset="-122"/>
                 <a:cs typeface="Georgia" pitchFamily="34" charset="-120"/>
               </a:rPr>
-              <a:t>The flow</a:t>
+              <a:t>Materials</a:t>
             </a:r>
             <a:endParaRPr lang="en-US" sz="1800" dirty="0"/>
           </a:p>
@@ -2583,6 +3123,76 @@
       <p:sp>
         <p:nvSpPr>
           <p:cNvPr id="4" name="Text 2"/>
+          <p:cNvSpPr/>
+          <p:nvPr/>
+        </p:nvSpPr>
+        <p:spPr>
+          <a:xfrm>
+            <a:off x="634901" y="883593"/>
+            <a:ext cx="8102798" cy="525661"/>
+          </a:xfrm>
+          <a:prstGeom prst="rect">
+            <a:avLst/>
+          </a:prstGeom>
+          <a:noFill/>
+          <a:ln/>
+        </p:spPr>
+        <p:txBody>
+          <a:bodyPr wrap="square" lIns="0" tIns="0" rIns="0" bIns="0" rtlCol="0" anchor="t"/>
+          <a:lstStyle/>
+          <a:p>
+            <a:pPr algn="l" marL="342900" indent="-342900">
+              <a:lnSpc>
+                <a:spcPts val="1620"/>
+              </a:lnSpc>
+              <a:spcAft>
+                <a:spcPts val="300"/>
+              </a:spcAft>
+              <a:buSzPct val="100000"/>
+              <a:buChar char="•"/>
+            </a:pPr>
+            <a:r>
+              <a:rPr lang="en-US" sz="1200" dirty="0">
+                <a:solidFill>
+                  <a:srgbClr val="2C2C2C"/>
+                </a:solidFill>
+                <a:latin typeface="Verdana" pitchFamily="34" charset="0"/>
+                <a:ea typeface="Verdana" pitchFamily="34" charset="-122"/>
+                <a:cs typeface="Verdana" pitchFamily="34" charset="-120"/>
+              </a:rPr>
+              <a:t>Notebook, pencils, drawing paper</a:t>
+            </a:r>
+            <a:endParaRPr lang="en-US" sz="1200" dirty="0"/>
+          </a:p>
+          <a:p>
+            <a:pPr algn="l" marL="342900" indent="-342900">
+              <a:lnSpc>
+                <a:spcPts val="1620"/>
+              </a:lnSpc>
+              <a:spcAft>
+                <a:spcPts val="300"/>
+              </a:spcAft>
+              <a:buSzPct val="100000"/>
+              <a:buChar char="•"/>
+            </a:pPr>
+            <a:r>
+              <a:rPr lang="en-US" sz="1200" dirty="0">
+                <a:solidFill>
+                  <a:srgbClr val="2C2C2C"/>
+                </a:solidFill>
+                <a:latin typeface="Verdana" pitchFamily="34" charset="0"/>
+                <a:ea typeface="Verdana" pitchFamily="34" charset="-122"/>
+                <a:cs typeface="Verdana" pitchFamily="34" charset="-120"/>
+              </a:rPr>
+              <a:t>(See lesson-plan.md for any day-specific materials)</a:t>
+            </a:r>
+            <a:endParaRPr lang="en-US" sz="1200" dirty="0"/>
+          </a:p>
+        </p:txBody>
+      </p:sp>
+      <p:sp>
+        <p:nvSpPr>
+          <p:cNvPr id="5" name="Text 3"/>
           <p:cNvSpPr/>
           <p:nvPr/>
         </p:nvSpPr>
@@ -2732,7 +3342,7 @@
                 <a:ea typeface="Georgia" pitchFamily="34" charset="-122"/>
                 <a:cs typeface="Georgia" pitchFamily="34" charset="-120"/>
               </a:rPr>
-              <a:t>Settle + chant (3 min)</a:t>
+              <a:t>The flow</a:t>
             </a:r>
             <a:endParaRPr lang="en-US" sz="1800" dirty="0"/>
           </a:p>
@@ -2741,54 +3351,6 @@
       <p:sp>
         <p:nvSpPr>
           <p:cNvPr id="4" name="Text 2"/>
-          <p:cNvSpPr/>
-          <p:nvPr/>
-        </p:nvSpPr>
-        <p:spPr>
-          <a:xfrm>
-            <a:off x="406301" y="870942"/>
-            <a:ext cx="8498026" cy="213271"/>
-          </a:xfrm>
-          <a:prstGeom prst="rect">
-            <a:avLst/>
-          </a:prstGeom>
-          <a:noFill/>
-          <a:ln/>
-        </p:spPr>
-        <p:txBody>
-          <a:bodyPr wrap="square" lIns="0" tIns="0" rIns="0" bIns="0" rtlCol="0" anchor="t"/>
-          <a:lstStyle/>
-          <a:p>
-            <a:pPr algn="l" indent="0" marL="0">
-              <a:lnSpc>
-                <a:spcPts val="1680"/>
-              </a:lnSpc>
-              <a:spcBef>
-                <a:spcPts val="300"/>
-              </a:spcBef>
-              <a:spcAft>
-                <a:spcPts val="300"/>
-              </a:spcAft>
-              <a:buNone/>
-            </a:pPr>
-            <a:r>
-              <a:rPr lang="en-US" sz="1200" dirty="0">
-                <a:solidFill>
-                  <a:srgbClr val="2C2C2C"/>
-                </a:solidFill>
-                <a:latin typeface="Verdana" pitchFamily="34" charset="0"/>
-                <a:ea typeface="Verdana" pitchFamily="34" charset="-122"/>
-                <a:cs typeface="Verdana" pitchFamily="34" charset="-120"/>
-              </a:rPr>
-              <a:t>Daily chant or breathing exercise.</a:t>
-            </a:r>
-            <a:endParaRPr lang="en-US" sz="1200" dirty="0"/>
-          </a:p>
-        </p:txBody>
-      </p:sp>
-      <p:sp>
-        <p:nvSpPr>
-          <p:cNvPr id="5" name="Text 3"/>
           <p:cNvSpPr/>
           <p:nvPr/>
         </p:nvSpPr>
@@ -2938,7 +3500,7 @@
                 <a:ea typeface="Georgia" pitchFamily="34" charset="-122"/>
                 <a:cs typeface="Georgia" pitchFamily="34" charset="-120"/>
               </a:rPr>
-              <a:t>Story recall (4 min)</a:t>
+              <a:t>Settle + chant (3 min)</a:t>
             </a:r>
             <a:endParaRPr lang="en-US" sz="1800" dirty="0"/>
           </a:p>
@@ -2986,30 +3548,7 @@
                 <a:ea typeface="Verdana" pitchFamily="34" charset="-122"/>
                 <a:cs typeface="Verdana" pitchFamily="34" charset="-120"/>
               </a:rPr>
-              <a:t>Briefly recall yesterday's lesson by asking: </a:t>
-            </a:r>
-            <a:pPr algn="l" indent="0" marL="0">
-              <a:lnSpc>
-                <a:spcPts val="1680"/>
-              </a:lnSpc>
-              <a:spcBef>
-                <a:spcPts val="300"/>
-              </a:spcBef>
-              <a:spcAft>
-                <a:spcPts val="300"/>
-              </a:spcAft>
-              <a:buNone/>
-            </a:pPr>
-            <a:r>
-              <a:rPr lang="en-US" sz="1200" i="1" dirty="0">
-                <a:solidFill>
-                  <a:srgbClr val="2C2C2C"/>
-                </a:solidFill>
-                <a:latin typeface="Verdana" pitchFamily="34" charset="0"/>
-                <a:ea typeface="Verdana" pitchFamily="34" charset="-122"/>
-                <a:cs typeface="Verdana" pitchFamily="34" charset="-120"/>
-              </a:rPr>
-              <a:t>"What's one thing you remember from yesterday?"</a:t>
+              <a:t>Daily chant or breathing exercise.</a:t>
             </a:r>
             <a:endParaRPr lang="en-US" sz="1200" dirty="0"/>
           </a:p>
@@ -3167,7 +3706,7 @@
                 <a:ea typeface="Georgia" pitchFamily="34" charset="-122"/>
                 <a:cs typeface="Georgia" pitchFamily="34" charset="-120"/>
               </a:rPr>
-              <a:t>Today's idea (10 min)</a:t>
+              <a:t>Story recall (4 min)</a:t>
             </a:r>
             <a:endParaRPr lang="en-US" sz="1800" dirty="0"/>
           </a:p>
@@ -3181,8 +3720,8 @@
         </p:nvSpPr>
         <p:spPr>
           <a:xfrm>
-            <a:off x="634901" y="883593"/>
-            <a:ext cx="8102798" cy="281880"/>
+            <a:off x="406301" y="870942"/>
+            <a:ext cx="8498026" cy="213271"/>
           </a:xfrm>
           <a:prstGeom prst="rect">
             <a:avLst/>
@@ -3194,18 +3733,20 @@
           <a:bodyPr wrap="square" lIns="0" tIns="0" rIns="0" bIns="0" rtlCol="0" anchor="t"/>
           <a:lstStyle/>
           <a:p>
-            <a:pPr algn="l" marL="342900" indent="-342900">
-              <a:lnSpc>
-                <a:spcPts val="1620"/>
-              </a:lnSpc>
-              <a:spcAft>
-                <a:spcPts val="300"/>
-              </a:spcAft>
-              <a:buSzPct val="100000"/>
-              <a:buChar char="•"/>
-            </a:pPr>
-            <a:r>
-              <a:rPr lang="en-US" sz="1200" i="1" dirty="0">
+            <a:pPr algn="l" indent="0" marL="0">
+              <a:lnSpc>
+                <a:spcPts val="1680"/>
+              </a:lnSpc>
+              <a:spcBef>
+                <a:spcPts val="300"/>
+              </a:spcBef>
+              <a:spcAft>
+                <a:spcPts val="300"/>
+              </a:spcAft>
+              <a:buNone/>
+            </a:pPr>
+            <a:r>
+              <a:rPr lang="en-US" sz="1200" dirty="0">
                 <a:solidFill>
                   <a:srgbClr val="2C2C2C"/>
                 </a:solidFill>
@@ -3213,19 +3754,22 @@
                 <a:ea typeface="Verdana" pitchFamily="34" charset="-122"/>
                 <a:cs typeface="Verdana" pitchFamily="34" charset="-120"/>
               </a:rPr>
-              <a:t>pudīnā</a:t>
+              <a:t>Briefly recall yesterday's lesson by asking: </a:t>
             </a:r>
             <a:pPr algn="l" indent="0" marL="0">
               <a:lnSpc>
-                <a:spcPts val="1620"/>
-              </a:lnSpc>
-              <a:spcAft>
-                <a:spcPts val="300"/>
-              </a:spcAft>
-              <a:buNone/>
-            </a:pPr>
-            <a:r>
-              <a:rPr lang="en-US" sz="1200" dirty="0">
+                <a:spcPts val="1680"/>
+              </a:lnSpc>
+              <a:spcBef>
+                <a:spcPts val="300"/>
+              </a:spcBef>
+              <a:spcAft>
+                <a:spcPts val="300"/>
+              </a:spcAft>
+              <a:buNone/>
+            </a:pPr>
+            <a:r>
+              <a:rPr lang="en-US" sz="1200" i="1" dirty="0">
                 <a:solidFill>
                   <a:srgbClr val="2C2C2C"/>
                 </a:solidFill>
@@ -3233,47 +3777,7 @@
                 <a:ea typeface="Verdana" pitchFamily="34" charset="-122"/>
                 <a:cs typeface="Verdana" pitchFamily="34" charset="-120"/>
               </a:rPr>
-              <a:t> (IAST: pudīnā; lit. "mint — </a:t>
-            </a:r>
-            <a:pPr algn="l" indent="0" marL="0">
-              <a:lnSpc>
-                <a:spcPts val="1620"/>
-              </a:lnSpc>
-              <a:spcAft>
-                <a:spcPts val="300"/>
-              </a:spcAft>
-              <a:buNone/>
-            </a:pPr>
-            <a:r>
-              <a:rPr lang="en-US" sz="1200" i="1" dirty="0">
-                <a:solidFill>
-                  <a:srgbClr val="2C2C2C"/>
-                </a:solidFill>
-                <a:latin typeface="Verdana" pitchFamily="34" charset="0"/>
-                <a:ea typeface="Verdana" pitchFamily="34" charset="-122"/>
-                <a:cs typeface="Verdana" pitchFamily="34" charset="-120"/>
-              </a:rPr>
-              <a:t>Mentha</a:t>
-            </a:r>
-            <a:pPr algn="l" indent="0" marL="0">
-              <a:lnSpc>
-                <a:spcPts val="1620"/>
-              </a:lnSpc>
-              <a:spcAft>
-                <a:spcPts val="300"/>
-              </a:spcAft>
-              <a:buNone/>
-            </a:pPr>
-            <a:r>
-              <a:rPr lang="en-US" sz="1200" dirty="0">
-                <a:solidFill>
-                  <a:srgbClr val="2C2C2C"/>
-                </a:solidFill>
-                <a:latin typeface="Verdana" pitchFamily="34" charset="0"/>
-                <a:ea typeface="Verdana" pitchFamily="34" charset="-122"/>
-                <a:cs typeface="Verdana" pitchFamily="34" charset="-120"/>
-              </a:rPr>
-              <a:t> spp.")</a:t>
+              <a:t>"What's one thing you remember from yesterday?"</a:t>
             </a:r>
             <a:endParaRPr lang="en-US" sz="1200" dirty="0"/>
           </a:p>
@@ -3282,246 +3786,6 @@
       <p:sp>
         <p:nvSpPr>
           <p:cNvPr id="5" name="Text 3"/>
-          <p:cNvSpPr/>
-          <p:nvPr/>
-        </p:nvSpPr>
-        <p:spPr>
-          <a:xfrm>
-            <a:off x="406301" y="1254323"/>
-            <a:ext cx="8498026" cy="213271"/>
-          </a:xfrm>
-          <a:prstGeom prst="rect">
-            <a:avLst/>
-          </a:prstGeom>
-          <a:noFill/>
-          <a:ln/>
-        </p:spPr>
-        <p:txBody>
-          <a:bodyPr wrap="square" lIns="0" tIns="0" rIns="0" bIns="0" rtlCol="0" anchor="t"/>
-          <a:lstStyle/>
-          <a:p>
-            <a:pPr algn="l" indent="0" marL="0">
-              <a:lnSpc>
-                <a:spcPts val="1680"/>
-              </a:lnSpc>
-              <a:spcBef>
-                <a:spcPts val="300"/>
-              </a:spcBef>
-              <a:spcAft>
-                <a:spcPts val="300"/>
-              </a:spcAft>
-              <a:buNone/>
-            </a:pPr>
-            <a:r>
-              <a:rPr lang="en-US" sz="1200" dirty="0">
-                <a:solidFill>
-                  <a:srgbClr val="2C2C2C"/>
-                </a:solidFill>
-                <a:latin typeface="Verdana" pitchFamily="34" charset="0"/>
-                <a:ea typeface="Verdana" pitchFamily="34" charset="-122"/>
-                <a:cs typeface="Verdana" pitchFamily="34" charset="-120"/>
-              </a:rPr>
-              <a:t>– Today: meet Mint (Pudīnā)! 🌿</a:t>
-            </a:r>
-            <a:endParaRPr lang="en-US" sz="1200" dirty="0"/>
-          </a:p>
-        </p:txBody>
-      </p:sp>
-      <p:sp>
-        <p:nvSpPr>
-          <p:cNvPr id="6" name="Text 4"/>
-          <p:cNvSpPr/>
-          <p:nvPr/>
-        </p:nvSpPr>
-        <p:spPr>
-          <a:xfrm>
-            <a:off x="406301" y="1543794"/>
-            <a:ext cx="8498026" cy="213271"/>
-          </a:xfrm>
-          <a:prstGeom prst="rect">
-            <a:avLst/>
-          </a:prstGeom>
-          <a:noFill/>
-          <a:ln/>
-        </p:spPr>
-        <p:txBody>
-          <a:bodyPr wrap="square" lIns="0" tIns="0" rIns="0" bIns="0" rtlCol="0" anchor="t"/>
-          <a:lstStyle/>
-          <a:p>
-            <a:pPr algn="l" indent="0" marL="0">
-              <a:lnSpc>
-                <a:spcPts val="1680"/>
-              </a:lnSpc>
-              <a:spcBef>
-                <a:spcPts val="300"/>
-              </a:spcBef>
-              <a:spcAft>
-                <a:spcPts val="300"/>
-              </a:spcAft>
-              <a:buNone/>
-            </a:pPr>
-            <a:r>
-              <a:rPr lang="en-US" sz="1200" dirty="0">
-                <a:solidFill>
-                  <a:srgbClr val="2C2C2C"/>
-                </a:solidFill>
-                <a:latin typeface="Verdana" pitchFamily="34" charset="0"/>
-                <a:ea typeface="Verdana" pitchFamily="34" charset="-122"/>
-                <a:cs typeface="Verdana" pitchFamily="34" charset="-120"/>
-              </a:rPr>
-              <a:t>Show fresh mint leaves. Smell — fresh, cool! Crush a leaf — smell stronger.</a:t>
-            </a:r>
-            <a:endParaRPr lang="en-US" sz="1200" dirty="0"/>
-          </a:p>
-        </p:txBody>
-      </p:sp>
-      <p:sp>
-        <p:nvSpPr>
-          <p:cNvPr id="7" name="Text 5"/>
-          <p:cNvSpPr/>
-          <p:nvPr/>
-        </p:nvSpPr>
-        <p:spPr>
-          <a:xfrm>
-            <a:off x="406301" y="1833265"/>
-            <a:ext cx="8498026" cy="213271"/>
-          </a:xfrm>
-          <a:prstGeom prst="rect">
-            <a:avLst/>
-          </a:prstGeom>
-          <a:noFill/>
-          <a:ln/>
-        </p:spPr>
-        <p:txBody>
-          <a:bodyPr wrap="square" lIns="0" tIns="0" rIns="0" bIns="0" rtlCol="0" anchor="t"/>
-          <a:lstStyle/>
-          <a:p>
-            <a:pPr algn="l" indent="0" marL="0">
-              <a:lnSpc>
-                <a:spcPts val="1680"/>
-              </a:lnSpc>
-              <a:spcBef>
-                <a:spcPts val="300"/>
-              </a:spcBef>
-              <a:spcAft>
-                <a:spcPts val="300"/>
-              </a:spcAft>
-              <a:buNone/>
-            </a:pPr>
-            <a:r>
-              <a:rPr lang="en-US" sz="1200" i="1" dirty="0">
-                <a:solidFill>
-                  <a:srgbClr val="2C2C2C"/>
-                </a:solidFill>
-                <a:latin typeface="Verdana" pitchFamily="34" charset="0"/>
-                <a:ea typeface="Verdana" pitchFamily="34" charset="-122"/>
-                <a:cs typeface="Verdana" pitchFamily="34" charset="-120"/>
-              </a:rPr>
-              <a:t>"Mint makes our mouth feel cool, even when it's not cold!"</a:t>
-            </a:r>
-            <a:endParaRPr lang="en-US" sz="1200" dirty="0"/>
-          </a:p>
-        </p:txBody>
-      </p:sp>
-      <p:sp>
-        <p:nvSpPr>
-          <p:cNvPr id="8" name="Text 6"/>
-          <p:cNvSpPr/>
-          <p:nvPr/>
-        </p:nvSpPr>
-        <p:spPr>
-          <a:xfrm>
-            <a:off x="406301" y="2122736"/>
-            <a:ext cx="8498026" cy="213271"/>
-          </a:xfrm>
-          <a:prstGeom prst="rect">
-            <a:avLst/>
-          </a:prstGeom>
-          <a:noFill/>
-          <a:ln/>
-        </p:spPr>
-        <p:txBody>
-          <a:bodyPr wrap="square" lIns="0" tIns="0" rIns="0" bIns="0" rtlCol="0" anchor="t"/>
-          <a:lstStyle/>
-          <a:p>
-            <a:pPr algn="l" indent="0" marL="0">
-              <a:lnSpc>
-                <a:spcPts val="1680"/>
-              </a:lnSpc>
-              <a:spcBef>
-                <a:spcPts val="300"/>
-              </a:spcBef>
-              <a:spcAft>
-                <a:spcPts val="300"/>
-              </a:spcAft>
-              <a:buNone/>
-            </a:pPr>
-            <a:r>
-              <a:rPr lang="en-US" sz="1200" dirty="0">
-                <a:solidFill>
-                  <a:srgbClr val="2C2C2C"/>
-                </a:solidFill>
-                <a:latin typeface="Verdana" pitchFamily="34" charset="0"/>
-                <a:ea typeface="Verdana" pitchFamily="34" charset="-122"/>
-                <a:cs typeface="Verdana" pitchFamily="34" charset="-120"/>
-              </a:rPr>
-              <a:t>Mint chutney is yummy with food. Mint tea is good in summer.</a:t>
-            </a:r>
-            <a:endParaRPr lang="en-US" sz="1200" dirty="0"/>
-          </a:p>
-        </p:txBody>
-      </p:sp>
-      <p:sp>
-        <p:nvSpPr>
-          <p:cNvPr id="9" name="Text 7"/>
-          <p:cNvSpPr/>
-          <p:nvPr/>
-        </p:nvSpPr>
-        <p:spPr>
-          <a:xfrm>
-            <a:off x="406301" y="2412206"/>
-            <a:ext cx="8498026" cy="213271"/>
-          </a:xfrm>
-          <a:prstGeom prst="rect">
-            <a:avLst/>
-          </a:prstGeom>
-          <a:noFill/>
-          <a:ln/>
-        </p:spPr>
-        <p:txBody>
-          <a:bodyPr wrap="square" lIns="0" tIns="0" rIns="0" bIns="0" rtlCol="0" anchor="t"/>
-          <a:lstStyle/>
-          <a:p>
-            <a:pPr algn="l" indent="0" marL="0">
-              <a:lnSpc>
-                <a:spcPts val="1680"/>
-              </a:lnSpc>
-              <a:spcBef>
-                <a:spcPts val="300"/>
-              </a:spcBef>
-              <a:spcAft>
-                <a:spcPts val="300"/>
-              </a:spcAft>
-              <a:buNone/>
-            </a:pPr>
-            <a:r>
-              <a:rPr lang="en-US" sz="1200" dirty="0">
-                <a:solidFill>
-                  <a:srgbClr val="2C2C2C"/>
-                </a:solidFill>
-                <a:latin typeface="Verdana" pitchFamily="34" charset="0"/>
-                <a:ea typeface="Verdana" pitchFamily="34" charset="-122"/>
-                <a:cs typeface="Verdana" pitchFamily="34" charset="-120"/>
-              </a:rPr>
-              <a:t>Children draw a mint leaf (small, oval, slightly bumpy) and write "pudīnā" beside.</a:t>
-            </a:r>
-            <a:endParaRPr lang="en-US" sz="1200" dirty="0"/>
-          </a:p>
-        </p:txBody>
-      </p:sp>
-      <p:sp>
-        <p:nvSpPr>
-          <p:cNvPr id="10" name="Text 8"/>
           <p:cNvSpPr/>
           <p:nvPr/>
         </p:nvSpPr>
@@ -3671,7 +3935,7 @@
                 <a:ea typeface="Georgia" pitchFamily="34" charset="-122"/>
                 <a:cs typeface="Georgia" pitchFamily="34" charset="-120"/>
               </a:rPr>
-              <a:t>Activity (8 min)</a:t>
+              <a:t>Today's idea (10 min)</a:t>
             </a:r>
             <a:endParaRPr lang="en-US" sz="1800" dirty="0"/>
           </a:p>
@@ -3685,8 +3949,8 @@
         </p:nvSpPr>
         <p:spPr>
           <a:xfrm>
-            <a:off x="406301" y="870942"/>
-            <a:ext cx="8498026" cy="232321"/>
+            <a:off x="634901" y="883593"/>
+            <a:ext cx="8102798" cy="281880"/>
           </a:xfrm>
           <a:prstGeom prst="rect">
             <a:avLst/>
@@ -3698,20 +3962,18 @@
           <a:bodyPr wrap="square" lIns="0" tIns="0" rIns="0" bIns="0" rtlCol="0" anchor="t"/>
           <a:lstStyle/>
           <a:p>
-            <a:pPr algn="l" indent="0" marL="0">
-              <a:lnSpc>
-                <a:spcPts val="1680"/>
-              </a:lnSpc>
-              <a:spcBef>
-                <a:spcPts val="300"/>
-              </a:spcBef>
-              <a:spcAft>
-                <a:spcPts val="300"/>
-              </a:spcAft>
-              <a:buNone/>
-            </a:pPr>
-            <a:r>
-              <a:rPr lang="en-US" sz="1200" dirty="0">
+            <a:pPr algn="l" marL="342900" indent="-342900">
+              <a:lnSpc>
+                <a:spcPts val="1620"/>
+              </a:lnSpc>
+              <a:spcAft>
+                <a:spcPts val="300"/>
+              </a:spcAft>
+              <a:buSzPct val="100000"/>
+              <a:buChar char="•"/>
+            </a:pPr>
+            <a:r>
+              <a:rPr lang="en-US" sz="1200" i="1" dirty="0">
                 <a:solidFill>
                   <a:srgbClr val="2C2C2C"/>
                 </a:solidFill>
@@ -3719,22 +3981,19 @@
                 <a:ea typeface="Verdana" pitchFamily="34" charset="-122"/>
                 <a:cs typeface="Verdana" pitchFamily="34" charset="-120"/>
               </a:rPr>
-              <a:t>A simplified version of </a:t>
+              <a:t>pudīnā</a:t>
             </a:r>
             <a:pPr algn="l" indent="0" marL="0">
               <a:lnSpc>
-                <a:spcPts val="1680"/>
-              </a:lnSpc>
-              <a:spcBef>
-                <a:spcPts val="300"/>
-              </a:spcBef>
-              <a:spcAft>
-                <a:spcPts val="300"/>
-              </a:spcAft>
-              <a:buNone/>
-            </a:pPr>
-            <a:r>
-              <a:rPr lang="en-US" sz="1200" i="1" dirty="0">
+                <a:spcPts val="1620"/>
+              </a:lnSpc>
+              <a:spcAft>
+                <a:spcPts val="300"/>
+              </a:spcAft>
+              <a:buNone/>
+            </a:pPr>
+            <a:r>
+              <a:rPr lang="en-US" sz="1200" dirty="0">
                 <a:solidFill>
                   <a:srgbClr val="2C2C2C"/>
                 </a:solidFill>
@@ -3742,22 +4001,19 @@
                 <a:ea typeface="Verdana" pitchFamily="34" charset="-122"/>
                 <a:cs typeface="Verdana" pitchFamily="34" charset="-120"/>
               </a:rPr>
-              <a:t>Blind Smell-Test Identification</a:t>
+              <a:t> (IAST: pudīnā; lit. "mint — </a:t>
             </a:r>
             <a:pPr algn="l" indent="0" marL="0">
               <a:lnSpc>
-                <a:spcPts val="1680"/>
-              </a:lnSpc>
-              <a:spcBef>
-                <a:spcPts val="300"/>
-              </a:spcBef>
-              <a:spcAft>
-                <a:spcPts val="300"/>
-              </a:spcAft>
-              <a:buNone/>
-            </a:pPr>
-            <a:r>
-              <a:rPr lang="en-US" sz="1200" dirty="0">
+                <a:spcPts val="1620"/>
+              </a:lnSpc>
+              <a:spcAft>
+                <a:spcPts val="300"/>
+              </a:spcAft>
+              <a:buNone/>
+            </a:pPr>
+            <a:r>
+              <a:rPr lang="en-US" sz="1200" i="1" dirty="0">
                 <a:solidFill>
                   <a:srgbClr val="2C2C2C"/>
                 </a:solidFill>
@@ -3765,15 +4021,12 @@
                 <a:ea typeface="Verdana" pitchFamily="34" charset="-122"/>
                 <a:cs typeface="Verdana" pitchFamily="34" charset="-120"/>
               </a:rPr>
-              <a:t> (see </a:t>
+              <a:t>Mentha</a:t>
             </a:r>
             <a:pPr algn="l" indent="0" marL="0">
               <a:lnSpc>
-                <a:spcPts val="1680"/>
-              </a:lnSpc>
-              <a:spcBef>
-                <a:spcPts val="300"/>
-              </a:spcBef>
+                <a:spcPts val="1620"/>
+              </a:lnSpc>
               <a:spcAft>
                 <a:spcPts val="300"/>
               </a:spcAft>
@@ -3788,19 +4041,42 @@
                 <a:ea typeface="Verdana" pitchFamily="34" charset="-122"/>
                 <a:cs typeface="Verdana" pitchFamily="34" charset="-120"/>
               </a:rPr>
-              <a:t>activities/</a:t>
-            </a:r>
-            <a:pPr algn="l" indent="0" marL="0">
-              <a:lnSpc>
-                <a:spcPts val="1680"/>
-              </a:lnSpc>
-              <a:spcBef>
-                <a:spcPts val="300"/>
-              </a:spcBef>
-              <a:spcAft>
-                <a:spcPts val="300"/>
-              </a:spcAft>
-              <a:buNone/>
+              <a:t> spp.")</a:t>
+            </a:r>
+            <a:endParaRPr lang="en-US" sz="1200" dirty="0"/>
+          </a:p>
+        </p:txBody>
+      </p:sp>
+      <p:sp>
+        <p:nvSpPr>
+          <p:cNvPr id="5" name="Text 3"/>
+          <p:cNvSpPr/>
+          <p:nvPr/>
+        </p:nvSpPr>
+        <p:spPr>
+          <a:xfrm>
+            <a:off x="634901" y="1266974"/>
+            <a:ext cx="8102798" cy="281880"/>
+          </a:xfrm>
+          <a:prstGeom prst="rect">
+            <a:avLst/>
+          </a:prstGeom>
+          <a:noFill/>
+          <a:ln/>
+        </p:spPr>
+        <p:txBody>
+          <a:bodyPr wrap="square" lIns="0" tIns="0" rIns="0" bIns="0" rtlCol="0" anchor="t"/>
+          <a:lstStyle/>
+          <a:p>
+            <a:pPr algn="l" marL="342900" indent="-342900">
+              <a:lnSpc>
+                <a:spcPts val="1620"/>
+              </a:lnSpc>
+              <a:spcAft>
+                <a:spcPts val="300"/>
+              </a:spcAft>
+              <a:buSzPct val="100000"/>
+              <a:buChar char="•"/>
             </a:pPr>
             <a:r>
               <a:rPr lang="en-US" sz="1200" dirty="0">
@@ -3811,7 +4087,7 @@
                 <a:ea typeface="Verdana" pitchFamily="34" charset="-122"/>
                 <a:cs typeface="Verdana" pitchFamily="34" charset="-120"/>
               </a:rPr>
-              <a:t>). Draw, sing, or act it out.</a:t>
+              <a:t>Today: meet Mint (Pudīnā)! 🌿</a:t>
             </a:r>
             <a:endParaRPr lang="en-US" sz="1200" dirty="0"/>
           </a:p>
@@ -3819,7 +4095,151 @@
       </p:sp>
       <p:sp>
         <p:nvSpPr>
-          <p:cNvPr id="5" name="Text 3"/>
+          <p:cNvPr id="6" name="Text 4"/>
+          <p:cNvSpPr/>
+          <p:nvPr/>
+        </p:nvSpPr>
+        <p:spPr>
+          <a:xfrm>
+            <a:off x="406301" y="1637705"/>
+            <a:ext cx="8498026" cy="213271"/>
+          </a:xfrm>
+          <a:prstGeom prst="rect">
+            <a:avLst/>
+          </a:prstGeom>
+          <a:noFill/>
+          <a:ln/>
+        </p:spPr>
+        <p:txBody>
+          <a:bodyPr wrap="square" lIns="0" tIns="0" rIns="0" bIns="0" rtlCol="0" anchor="t"/>
+          <a:lstStyle/>
+          <a:p>
+            <a:pPr algn="l" indent="0" marL="0">
+              <a:lnSpc>
+                <a:spcPts val="1680"/>
+              </a:lnSpc>
+              <a:spcBef>
+                <a:spcPts val="300"/>
+              </a:spcBef>
+              <a:spcAft>
+                <a:spcPts val="300"/>
+              </a:spcAft>
+              <a:buNone/>
+            </a:pPr>
+            <a:r>
+              <a:rPr lang="en-US" sz="1200" dirty="0">
+                <a:solidFill>
+                  <a:srgbClr val="2C2C2C"/>
+                </a:solidFill>
+                <a:latin typeface="Verdana" pitchFamily="34" charset="0"/>
+                <a:ea typeface="Verdana" pitchFamily="34" charset="-122"/>
+                <a:cs typeface="Verdana" pitchFamily="34" charset="-120"/>
+              </a:rPr>
+              <a:t>Show fresh mint leaves. Smell — fresh, cool! Crush a leaf — smell stronger.</a:t>
+            </a:r>
+            <a:endParaRPr lang="en-US" sz="1200" dirty="0"/>
+          </a:p>
+        </p:txBody>
+      </p:sp>
+      <p:sp>
+        <p:nvSpPr>
+          <p:cNvPr id="7" name="Text 5"/>
+          <p:cNvSpPr/>
+          <p:nvPr/>
+        </p:nvSpPr>
+        <p:spPr>
+          <a:xfrm>
+            <a:off x="406301" y="1927175"/>
+            <a:ext cx="8498026" cy="213271"/>
+          </a:xfrm>
+          <a:prstGeom prst="rect">
+            <a:avLst/>
+          </a:prstGeom>
+          <a:noFill/>
+          <a:ln/>
+        </p:spPr>
+        <p:txBody>
+          <a:bodyPr wrap="square" lIns="0" tIns="0" rIns="0" bIns="0" rtlCol="0" anchor="t"/>
+          <a:lstStyle/>
+          <a:p>
+            <a:pPr algn="l" indent="0" marL="0">
+              <a:lnSpc>
+                <a:spcPts val="1680"/>
+              </a:lnSpc>
+              <a:spcBef>
+                <a:spcPts val="300"/>
+              </a:spcBef>
+              <a:spcAft>
+                <a:spcPts val="300"/>
+              </a:spcAft>
+              <a:buNone/>
+            </a:pPr>
+            <a:r>
+              <a:rPr lang="en-US" sz="1200" i="1" dirty="0">
+                <a:solidFill>
+                  <a:srgbClr val="2C2C2C"/>
+                </a:solidFill>
+                <a:latin typeface="Verdana" pitchFamily="34" charset="0"/>
+                <a:ea typeface="Verdana" pitchFamily="34" charset="-122"/>
+                <a:cs typeface="Verdana" pitchFamily="34" charset="-120"/>
+              </a:rPr>
+              <a:t>"Mint makes our mouth feel cool, even when it's not cold!"</a:t>
+            </a:r>
+            <a:endParaRPr lang="en-US" sz="1200" dirty="0"/>
+          </a:p>
+        </p:txBody>
+      </p:sp>
+      <p:sp>
+        <p:nvSpPr>
+          <p:cNvPr id="8" name="Text 6"/>
+          <p:cNvSpPr/>
+          <p:nvPr/>
+        </p:nvSpPr>
+        <p:spPr>
+          <a:xfrm>
+            <a:off x="406301" y="2216646"/>
+            <a:ext cx="8498026" cy="213271"/>
+          </a:xfrm>
+          <a:prstGeom prst="rect">
+            <a:avLst/>
+          </a:prstGeom>
+          <a:noFill/>
+          <a:ln/>
+        </p:spPr>
+        <p:txBody>
+          <a:bodyPr wrap="square" lIns="0" tIns="0" rIns="0" bIns="0" rtlCol="0" anchor="t"/>
+          <a:lstStyle/>
+          <a:p>
+            <a:pPr algn="l" indent="0" marL="0">
+              <a:lnSpc>
+                <a:spcPts val="1680"/>
+              </a:lnSpc>
+              <a:spcBef>
+                <a:spcPts val="300"/>
+              </a:spcBef>
+              <a:spcAft>
+                <a:spcPts val="300"/>
+              </a:spcAft>
+              <a:buNone/>
+            </a:pPr>
+            <a:r>
+              <a:rPr lang="en-US" sz="1200" dirty="0">
+                <a:solidFill>
+                  <a:srgbClr val="2C2C2C"/>
+                </a:solidFill>
+                <a:latin typeface="Verdana" pitchFamily="34" charset="0"/>
+                <a:ea typeface="Verdana" pitchFamily="34" charset="-122"/>
+                <a:cs typeface="Verdana" pitchFamily="34" charset="-120"/>
+              </a:rPr>
+              <a:t>Mint chutney is yummy with food. Mint tea is good in summer.</a:t>
+            </a:r>
+            <a:endParaRPr lang="en-US" sz="1200" dirty="0"/>
+          </a:p>
+        </p:txBody>
+      </p:sp>
+      <p:sp>
+        <p:nvSpPr>
+          <p:cNvPr id="9" name="Text 7"/>
           <p:cNvSpPr/>
           <p:nvPr/>
         </p:nvSpPr>
@@ -3969,7 +4389,7 @@
                 <a:ea typeface="Georgia" pitchFamily="34" charset="-122"/>
                 <a:cs typeface="Georgia" pitchFamily="34" charset="-120"/>
               </a:rPr>
-              <a:t>Wrap-up (3 min)</a:t>
+              <a:t>Today's idea (10 min) (cont.)</a:t>
             </a:r>
             <a:endParaRPr lang="en-US" sz="1800" dirty="0"/>
           </a:p>
@@ -4017,7 +4437,7 @@
                 <a:ea typeface="Verdana" pitchFamily="34" charset="-122"/>
                 <a:cs typeface="Verdana" pitchFamily="34" charset="-120"/>
               </a:rPr>
-              <a:t>Each child shares one word that describes today.</a:t>
+              <a:t>Children draw a mint leaf (small, oval, slightly bumpy) and write "pudīnā" beside.</a:t>
             </a:r>
             <a:endParaRPr lang="en-US" sz="1200" dirty="0"/>
           </a:p>
@@ -4175,7 +4595,7 @@
                 <a:ea typeface="Georgia" pitchFamily="34" charset="-122"/>
                 <a:cs typeface="Georgia" pitchFamily="34" charset="-120"/>
               </a:rPr>
-              <a:t>Homework</a:t>
+              <a:t>Activity (8 min)</a:t>
             </a:r>
             <a:endParaRPr lang="en-US" sz="1800" dirty="0"/>
           </a:p>
@@ -4223,7 +4643,7 @@
                 <a:ea typeface="Verdana" pitchFamily="34" charset="-122"/>
                 <a:cs typeface="Verdana" pitchFamily="34" charset="-120"/>
               </a:rPr>
-              <a:t>(See </a:t>
+              <a:t>A simplified version of </a:t>
             </a:r>
             <a:pPr algn="l" indent="0" marL="0">
               <a:lnSpc>
@@ -4238,7 +4658,7 @@
               <a:buNone/>
             </a:pPr>
             <a:r>
-              <a:rPr lang="en-US" sz="1200" dirty="0">
+              <a:rPr lang="en-US" sz="1200" i="1" dirty="0">
                 <a:solidFill>
                   <a:srgbClr val="2C2C2C"/>
                 </a:solidFill>
@@ -4246,7 +4666,7 @@
                 <a:ea typeface="Verdana" pitchFamily="34" charset="-122"/>
                 <a:cs typeface="Verdana" pitchFamily="34" charset="-120"/>
               </a:rPr>
-              <a:t>homework.md</a:t>
+              <a:t>Blind Smell-Test Identification</a:t>
             </a:r>
             <a:pPr algn="l" indent="0" marL="0">
               <a:lnSpc>
@@ -4269,7 +4689,53 @@
                 <a:ea typeface="Verdana" pitchFamily="34" charset="-122"/>
                 <a:cs typeface="Verdana" pitchFamily="34" charset="-120"/>
               </a:rPr>
-              <a:t>.)</a:t>
+              <a:t> (see </a:t>
+            </a:r>
+            <a:pPr algn="l" indent="0" marL="0">
+              <a:lnSpc>
+                <a:spcPts val="1680"/>
+              </a:lnSpc>
+              <a:spcBef>
+                <a:spcPts val="300"/>
+              </a:spcBef>
+              <a:spcAft>
+                <a:spcPts val="300"/>
+              </a:spcAft>
+              <a:buNone/>
+            </a:pPr>
+            <a:r>
+              <a:rPr lang="en-US" sz="1200" dirty="0">
+                <a:solidFill>
+                  <a:srgbClr val="2C2C2C"/>
+                </a:solidFill>
+                <a:latin typeface="Verdana" pitchFamily="34" charset="0"/>
+                <a:ea typeface="Verdana" pitchFamily="34" charset="-122"/>
+                <a:cs typeface="Verdana" pitchFamily="34" charset="-120"/>
+              </a:rPr>
+              <a:t>activities/</a:t>
+            </a:r>
+            <a:pPr algn="l" indent="0" marL="0">
+              <a:lnSpc>
+                <a:spcPts val="1680"/>
+              </a:lnSpc>
+              <a:spcBef>
+                <a:spcPts val="300"/>
+              </a:spcBef>
+              <a:spcAft>
+                <a:spcPts val="300"/>
+              </a:spcAft>
+              <a:buNone/>
+            </a:pPr>
+            <a:r>
+              <a:rPr lang="en-US" sz="1200" dirty="0">
+                <a:solidFill>
+                  <a:srgbClr val="2C2C2C"/>
+                </a:solidFill>
+                <a:latin typeface="Verdana" pitchFamily="34" charset="0"/>
+                <a:ea typeface="Verdana" pitchFamily="34" charset="-122"/>
+                <a:cs typeface="Verdana" pitchFamily="34" charset="-120"/>
+              </a:rPr>
+              <a:t>). Draw, sing, or act it out.</a:t>
             </a:r>
             <a:endParaRPr lang="en-US" sz="1200" dirty="0"/>
           </a:p>
